--- a/Doc/cluster_analysis/C02_Chip_Acquisition/C02_Chip_Acquisition_260430234442_Data_Flow_Review_v001.pptx
+++ b/Doc/cluster_analysis/C02_Chip_Acquisition/C02_Chip_Acquisition_260430234442_Data_Flow_Review_v001.pptx
@@ -4,6 +4,9 @@
   <p:sldMasterIdLst>
     <p:sldMasterId id="2147483648" r:id="rId1"/>
   </p:sldMasterIdLst>
+  <p:notesMasterIdLst>
+    <p:notesMasterId r:id="rId10"/>
+  </p:notesMasterIdLst>
   <p:sldIdLst>
     <p:sldId id="256" r:id="rId2"/>
     <p:sldId id="257" r:id="rId3"/>
@@ -14,9 +17,6 @@
     <p:sldId id="262" r:id="rId8"/>
     <p:sldId id="263" r:id="rId9"/>
   </p:sldIdLst>
-  <p:notesMasterIdLst>
-    <p:notesMasterId r:id="rId10"/>
-  </p:notesMasterIdLst>
   <p:sldSz cx="12192000" cy="6858000"/>
   <p:notesSz cx="6858000" cy="12192000"/>
   <p:defaultTextStyle>
@@ -111,6 +111,11 @@
       </a:defRPr>
     </a:lvl9pPr>
   </p:defaultTextStyle>
+  <p:extLst>
+    <p:ext uri="{EFAFB233-063F-42B5-8137-9DF3F51BA10A}">
+      <p15:sldGuideLst xmlns:p15="http://schemas.microsoft.com/office/powerpoint/2012/main"/>
+    </p:ext>
+  </p:extLst>
 </p:presentation>
 </file>
 
@@ -136,240 +141,16 @@
           <a:chExt cx="0" cy="0"/>
         </a:xfrm>
       </p:grpSpPr>
-      <p:sp>
-        <p:nvSpPr>
-          <p:cNvPr id="2" name="Header Placeholder 1"/>
-          <p:cNvSpPr>
-            <a:spLocks noGrp="1"/>
-          </p:cNvSpPr>
-          <p:nvPr>
-            <p:ph type="hdr" sz="quarter"/>
-          </p:nvPr>
-        </p:nvSpPr>
-        <p:spPr>
-          <a:xfrm>
-            <a:off x="0" y="0"/>
-            <a:ext cx="2971800" cy="458788"/>
-          </a:xfrm>
-          <a:prstGeom prst="rect">
-            <a:avLst/>
-          </a:prstGeom>
-        </p:spPr>
-        <p:txBody>
-          <a:bodyPr vert="horz" lIns="91440" tIns="45720" rIns="91440" bIns="45720" rtlCol="0"/>
-          <a:lstStyle>
-            <a:lvl1pPr algn="l">
-              <a:defRPr sz="1200"/>
-            </a:lvl1pPr>
-          </a:lstStyle>
-          <a:p>
-            <a:endParaRPr lang="en-US"/>
-          </a:p>
-        </p:txBody>
-      </p:sp>
-      <p:sp>
-        <p:nvSpPr>
-          <p:cNvPr id="3" name="Date Placeholder 2"/>
-          <p:cNvSpPr>
-            <a:spLocks noGrp="1"/>
-          </p:cNvSpPr>
-          <p:nvPr>
-            <p:ph type="dt" idx="1"/>
-          </p:nvPr>
-        </p:nvSpPr>
-        <p:spPr>
-          <a:xfrm>
-            <a:off x="3884613" y="0"/>
-            <a:ext cx="2971800" cy="458788"/>
-          </a:xfrm>
-          <a:prstGeom prst="rect">
-            <a:avLst/>
-          </a:prstGeom>
-        </p:spPr>
-        <p:txBody>
-          <a:bodyPr vert="horz" lIns="91440" tIns="45720" rIns="91440" bIns="45720" rtlCol="0"/>
-          <a:lstStyle>
-            <a:lvl1pPr algn="r">
-              <a:defRPr sz="1200"/>
-            </a:lvl1pPr>
-          </a:lstStyle>
-          <a:p>
-            <a:fld id="{5282F153-3F37-0F45-9E97-73ACFA13230C}" type="datetimeFigureOut">
-              <a:rPr lang="en-US"/>
-              <a:t>7/23/19</a:t>
-            </a:fld>
-            <a:endParaRPr lang="en-US"/>
-          </a:p>
-        </p:txBody>
-      </p:sp>
-      <p:sp>
-        <p:nvSpPr>
-          <p:cNvPr id="4" name="Slide Image Placeholder 3"/>
-          <p:cNvSpPr>
-            <a:spLocks noGrp="1" noRot="1" noChangeAspect="1"/>
-          </p:cNvSpPr>
-          <p:nvPr>
-            <p:ph type="sldImg" idx="2"/>
-          </p:nvPr>
-        </p:nvSpPr>
-        <p:spPr>
-          <a:xfrm>
-            <a:off x="685800" y="1143000"/>
-            <a:ext cx="5486400" cy="3086100"/>
-          </a:xfrm>
-          <a:prstGeom prst="rect">
-            <a:avLst/>
-          </a:prstGeom>
-          <a:noFill/>
-          <a:ln w="12700">
-            <a:solidFill>
-              <a:prstClr val="black"/>
-            </a:solidFill>
-          </a:ln>
-        </p:spPr>
-        <p:txBody>
-          <a:bodyPr vert="horz" lIns="91440" tIns="45720" rIns="91440" bIns="45720" rtlCol="0" anchor="ctr"/>
-          <a:lstStyle/>
-          <a:p>
-            <a:endParaRPr lang="en-US"/>
-          </a:p>
-        </p:txBody>
-      </p:sp>
-      <p:sp>
-        <p:nvSpPr>
-          <p:cNvPr id="5" name="Notes Placeholder 4"/>
-          <p:cNvSpPr>
-            <a:spLocks noGrp="1"/>
-          </p:cNvSpPr>
-          <p:nvPr>
-            <p:ph type="body" sz="quarter" idx="3"/>
-          </p:nvPr>
-        </p:nvSpPr>
-        <p:spPr>
-          <a:xfrm>
-            <a:off x="685800" y="4400550"/>
-            <a:ext cx="5486400" cy="3600450"/>
-          </a:xfrm>
-          <a:prstGeom prst="rect">
-            <a:avLst/>
-          </a:prstGeom>
-        </p:spPr>
-        <p:txBody>
-          <a:bodyPr vert="horz" lIns="91440" tIns="45720" rIns="91440" bIns="45720" rtlCol="0"/>
-          <a:lstStyle/>
-          <a:p>
-            <a:pPr lvl="0"/>
-            <a:r>
-              <a:rPr lang="en-US"/>
-              <a:t>Click to edit Master text styles</a:t>
-            </a:r>
-          </a:p>
-          <a:p>
-            <a:pPr lvl="1"/>
-            <a:r>
-              <a:rPr lang="en-US"/>
-              <a:t>Second level</a:t>
-            </a:r>
-          </a:p>
-          <a:p>
-            <a:pPr lvl="2"/>
-            <a:r>
-              <a:rPr lang="en-US"/>
-              <a:t>Third level</a:t>
-            </a:r>
-          </a:p>
-          <a:p>
-            <a:pPr lvl="3"/>
-            <a:r>
-              <a:rPr lang="en-US"/>
-              <a:t>Fourth level</a:t>
-            </a:r>
-          </a:p>
-          <a:p>
-            <a:pPr lvl="4"/>
-            <a:r>
-              <a:rPr lang="en-US"/>
-              <a:t>Fifth level</a:t>
-            </a:r>
-          </a:p>
-        </p:txBody>
-      </p:sp>
-      <p:sp>
-        <p:nvSpPr>
-          <p:cNvPr id="6" name="Footer Placeholder 5"/>
-          <p:cNvSpPr>
-            <a:spLocks noGrp="1"/>
-          </p:cNvSpPr>
-          <p:nvPr>
-            <p:ph type="ftr" sz="quarter" idx="4"/>
-          </p:nvPr>
-        </p:nvSpPr>
-        <p:spPr>
-          <a:xfrm>
-            <a:off x="0" y="8685213"/>
-            <a:ext cx="2971800" cy="458787"/>
-          </a:xfrm>
-          <a:prstGeom prst="rect">
-            <a:avLst/>
-          </a:prstGeom>
-        </p:spPr>
-        <p:txBody>
-          <a:bodyPr vert="horz" lIns="91440" tIns="45720" rIns="91440" bIns="45720" rtlCol="0" anchor="b"/>
-          <a:lstStyle>
-            <a:lvl1pPr algn="l">
-              <a:defRPr sz="1200"/>
-            </a:lvl1pPr>
-          </a:lstStyle>
-          <a:p>
-            <a:endParaRPr lang="en-US"/>
-          </a:p>
-        </p:txBody>
-      </p:sp>
-      <p:sp>
-        <p:nvSpPr>
-          <p:cNvPr id="7" name="Slide Number Placeholder 6"/>
-          <p:cNvSpPr>
-            <a:spLocks noGrp="1"/>
-          </p:cNvSpPr>
-          <p:nvPr>
-            <p:ph type="sldNum" sz="quarter" idx="5"/>
-          </p:nvPr>
-        </p:nvSpPr>
-        <p:spPr>
-          <a:xfrm>
-            <a:off x="3884613" y="8685213"/>
-            <a:ext cx="2971800" cy="458787"/>
-          </a:xfrm>
-          <a:prstGeom prst="rect">
-            <a:avLst/>
-          </a:prstGeom>
-        </p:spPr>
-        <p:txBody>
-          <a:bodyPr vert="horz" lIns="91440" tIns="45720" rIns="91440" bIns="45720" rtlCol="0" anchor="b"/>
-          <a:lstStyle>
-            <a:lvl1pPr algn="r">
-              <a:defRPr sz="1200"/>
-            </a:lvl1pPr>
-          </a:lstStyle>
-          <a:p>
-            <a:fld id="{CE5E9CC1-C706-0F49-92D6-E571CC5EEA8F}" type="slidenum">
-              <a:rPr lang="en-US"/>
-              <a:t>‹#›</a:t>
-            </a:fld>
-            <a:endParaRPr lang="en-US"/>
-          </a:p>
-        </p:txBody>
-      </p:sp>
     </p:spTree>
     <p:extLst>
       <p:ext uri="{BB962C8B-B14F-4D97-AF65-F5344CB8AC3E}">
-        <p14:creationId xmlns:p14="http://schemas.microsoft.com/office/powerpoint/2010/main" val="1024086991"/>
+        <p14:creationId xmlns:p14="http://schemas.microsoft.com/office/powerpoint/2010/main" val="1805526076"/>
       </p:ext>
     </p:extLst>
   </p:cSld>
   <p:clrMap bg1="lt1" tx1="dk1" bg2="lt2" tx2="dk2" accent1="accent1" accent2="accent2" accent3="accent3" accent4="accent4" accent5="accent5" accent6="accent6" hlink="hlink" folHlink="folHlink"/>
   <p:notesStyle>
-    <a:lvl1pPr marL="0" algn="l" defTabSz="914400" rtl="0" eaLnBrk="1" latinLnBrk="0" hangingPunct="1">
+    <a:lvl1pPr marL="0" algn="l" defTabSz="914400" rtl="0" eaLnBrk="1" latinLnBrk="1" hangingPunct="1">
       <a:defRPr sz="1200" kern="1200">
         <a:solidFill>
           <a:schemeClr val="tx1"/>
@@ -379,7 +160,7 @@
         <a:cs typeface="+mn-cs"/>
       </a:defRPr>
     </a:lvl1pPr>
-    <a:lvl2pPr marL="457200" algn="l" defTabSz="914400" rtl="0" eaLnBrk="1" latinLnBrk="0" hangingPunct="1">
+    <a:lvl2pPr marL="457200" algn="l" defTabSz="914400" rtl="0" eaLnBrk="1" latinLnBrk="1" hangingPunct="1">
       <a:defRPr sz="1200" kern="1200">
         <a:solidFill>
           <a:schemeClr val="tx1"/>
@@ -389,7 +170,7 @@
         <a:cs typeface="+mn-cs"/>
       </a:defRPr>
     </a:lvl2pPr>
-    <a:lvl3pPr marL="914400" algn="l" defTabSz="914400" rtl="0" eaLnBrk="1" latinLnBrk="0" hangingPunct="1">
+    <a:lvl3pPr marL="914400" algn="l" defTabSz="914400" rtl="0" eaLnBrk="1" latinLnBrk="1" hangingPunct="1">
       <a:defRPr sz="1200" kern="1200">
         <a:solidFill>
           <a:schemeClr val="tx1"/>
@@ -399,7 +180,7 @@
         <a:cs typeface="+mn-cs"/>
       </a:defRPr>
     </a:lvl3pPr>
-    <a:lvl4pPr marL="1371600" algn="l" defTabSz="914400" rtl="0" eaLnBrk="1" latinLnBrk="0" hangingPunct="1">
+    <a:lvl4pPr marL="1371600" algn="l" defTabSz="914400" rtl="0" eaLnBrk="1" latinLnBrk="1" hangingPunct="1">
       <a:defRPr sz="1200" kern="1200">
         <a:solidFill>
           <a:schemeClr val="tx1"/>
@@ -409,7 +190,7 @@
         <a:cs typeface="+mn-cs"/>
       </a:defRPr>
     </a:lvl4pPr>
-    <a:lvl5pPr marL="1828800" algn="l" defTabSz="914400" rtl="0" eaLnBrk="1" latinLnBrk="0" hangingPunct="1">
+    <a:lvl5pPr marL="1828800" algn="l" defTabSz="914400" rtl="0" eaLnBrk="1" latinLnBrk="1" hangingPunct="1">
       <a:defRPr sz="1200" kern="1200">
         <a:solidFill>
           <a:schemeClr val="tx1"/>
@@ -419,7 +200,7 @@
         <a:cs typeface="+mn-cs"/>
       </a:defRPr>
     </a:lvl5pPr>
-    <a:lvl6pPr marL="2286000" algn="l" defTabSz="914400" rtl="0" eaLnBrk="1" latinLnBrk="0" hangingPunct="1">
+    <a:lvl6pPr marL="2286000" algn="l" defTabSz="914400" rtl="0" eaLnBrk="1" latinLnBrk="1" hangingPunct="1">
       <a:defRPr sz="1200" kern="1200">
         <a:solidFill>
           <a:schemeClr val="tx1"/>
@@ -429,7 +210,7 @@
         <a:cs typeface="+mn-cs"/>
       </a:defRPr>
     </a:lvl6pPr>
-    <a:lvl7pPr marL="2743200" algn="l" defTabSz="914400" rtl="0" eaLnBrk="1" latinLnBrk="0" hangingPunct="1">
+    <a:lvl7pPr marL="2743200" algn="l" defTabSz="914400" rtl="0" eaLnBrk="1" latinLnBrk="1" hangingPunct="1">
       <a:defRPr sz="1200" kern="1200">
         <a:solidFill>
           <a:schemeClr val="tx1"/>
@@ -439,7 +220,7 @@
         <a:cs typeface="+mn-cs"/>
       </a:defRPr>
     </a:lvl7pPr>
-    <a:lvl8pPr marL="3200400" algn="l" defTabSz="914400" rtl="0" eaLnBrk="1" latinLnBrk="0" hangingPunct="1">
+    <a:lvl8pPr marL="3200400" algn="l" defTabSz="914400" rtl="0" eaLnBrk="1" latinLnBrk="1" hangingPunct="1">
       <a:defRPr sz="1200" kern="1200">
         <a:solidFill>
           <a:schemeClr val="tx1"/>
@@ -449,7 +230,7 @@
         <a:cs typeface="+mn-cs"/>
       </a:defRPr>
     </a:lvl8pPr>
-    <a:lvl9pPr marL="3657600" algn="l" defTabSz="914400" rtl="0" eaLnBrk="1" latinLnBrk="0" hangingPunct="1">
+    <a:lvl9pPr marL="3657600" algn="l" defTabSz="914400" rtl="0" eaLnBrk="1" latinLnBrk="1" hangingPunct="1">
       <a:defRPr sz="1200" kern="1200">
         <a:solidFill>
           <a:schemeClr val="tx1"/>
@@ -507,10 +288,6 @@
           <a:bodyPr/>
           <a:lstStyle/>
           <a:p>
-            <a:r>
-              <a:rPr lang="en-US" dirty="0"/>
-              <a:t/>
-            </a:r>
             <a:endParaRPr lang="en-US" dirty="0"/>
           </a:p>
         </p:txBody>
@@ -595,10 +372,6 @@
           <a:bodyPr/>
           <a:lstStyle/>
           <a:p>
-            <a:r>
-              <a:rPr lang="en-US" dirty="0"/>
-              <a:t/>
-            </a:r>
             <a:endParaRPr lang="en-US" dirty="0"/>
           </a:p>
         </p:txBody>
@@ -683,10 +456,6 @@
           <a:bodyPr/>
           <a:lstStyle/>
           <a:p>
-            <a:r>
-              <a:rPr lang="en-US" dirty="0"/>
-              <a:t/>
-            </a:r>
             <a:endParaRPr lang="en-US" dirty="0"/>
           </a:p>
         </p:txBody>
@@ -771,10 +540,6 @@
           <a:bodyPr/>
           <a:lstStyle/>
           <a:p>
-            <a:r>
-              <a:rPr lang="en-US" dirty="0"/>
-              <a:t/>
-            </a:r>
             <a:endParaRPr lang="en-US" dirty="0"/>
           </a:p>
         </p:txBody>
@@ -859,10 +624,6 @@
           <a:bodyPr/>
           <a:lstStyle/>
           <a:p>
-            <a:r>
-              <a:rPr lang="en-US" dirty="0"/>
-              <a:t/>
-            </a:r>
             <a:endParaRPr lang="en-US" dirty="0"/>
           </a:p>
         </p:txBody>
@@ -947,10 +708,6 @@
           <a:bodyPr/>
           <a:lstStyle/>
           <a:p>
-            <a:r>
-              <a:rPr lang="en-US" dirty="0"/>
-              <a:t/>
-            </a:r>
             <a:endParaRPr lang="en-US" dirty="0"/>
           </a:p>
         </p:txBody>
@@ -1035,10 +792,6 @@
           <a:bodyPr/>
           <a:lstStyle/>
           <a:p>
-            <a:r>
-              <a:rPr lang="en-US" dirty="0"/>
-              <a:t/>
-            </a:r>
             <a:endParaRPr lang="en-US" dirty="0"/>
           </a:p>
         </p:txBody>
@@ -1123,10 +876,6 @@
           <a:bodyPr/>
           <a:lstStyle/>
           <a:p>
-            <a:r>
-              <a:rPr lang="en-US" dirty="0"/>
-              <a:t/>
-            </a:r>
             <a:endParaRPr lang="en-US" dirty="0"/>
           </a:p>
         </p:txBody>
@@ -1200,6 +949,11 @@
 <file path=ppt/slideMasters/slideMaster1.xml><?xml version="1.0" encoding="utf-8"?>
 <p:sldMaster xmlns:a="http://schemas.openxmlformats.org/drawingml/2006/main" xmlns:r="http://schemas.openxmlformats.org/officeDocument/2006/relationships" xmlns:p="http://schemas.openxmlformats.org/presentationml/2006/main">
   <p:cSld>
+    <p:bg>
+      <p:bgRef idx="1001">
+        <a:schemeClr val="bg1"/>
+      </p:bgRef>
+    </p:bg>
     <p:spTree>
       <p:nvGrpSpPr>
         <p:cNvPr id="1" name=""/>
@@ -1482,6 +1236,7 @@
         <a:solidFill>
           <a:srgbClr val="F8FAFC"/>
         </a:solidFill>
+        <a:effectLst/>
       </p:bgPr>
     </p:bg>
     <p:spTree>
@@ -1521,7 +1276,7 @@
           </a:bodyPr>
           <a:lstStyle/>
           <a:p>
-            <a:pPr indent="0" marL="0">
+            <a:pPr marL="0" indent="0">
               <a:buNone/>
             </a:pPr>
             <a:r>
@@ -1562,7 +1317,7 @@
           </a:bodyPr>
           <a:lstStyle/>
           <a:p>
-            <a:pPr indent="0" marL="0">
+            <a:pPr marL="0" indent="0">
               <a:buNone/>
             </a:pPr>
             <a:r>
@@ -1653,7 +1408,7 @@
           </a:bodyPr>
           <a:lstStyle/>
           <a:p>
-            <a:pPr algn="ctr" indent="0" marL="0">
+            <a:pPr marL="0" indent="0" algn="ctr">
               <a:buNone/>
             </a:pPr>
             <a:r>
@@ -1670,7 +1425,7 @@
             <a:endParaRPr lang="en-US" sz="1400" dirty="0"/>
           </a:p>
           <a:p>
-            <a:pPr algn="ctr" indent="0" marL="0">
+            <a:pPr marL="0" indent="0" algn="ctr">
               <a:buNone/>
             </a:pPr>
             <a:r>
@@ -1738,7 +1493,7 @@
           </a:bodyPr>
           <a:lstStyle/>
           <a:p>
-            <a:pPr algn="ctr" indent="0" marL="0">
+            <a:pPr marL="0" indent="0" algn="ctr">
               <a:buNone/>
             </a:pPr>
             <a:r>
@@ -1755,7 +1510,7 @@
             <a:endParaRPr lang="en-US" sz="1400" dirty="0"/>
           </a:p>
           <a:p>
-            <a:pPr algn="ctr" indent="0" marL="0">
+            <a:pPr marL="0" indent="0" algn="ctr">
               <a:buNone/>
             </a:pPr>
             <a:r>
@@ -1823,7 +1578,7 @@
           </a:bodyPr>
           <a:lstStyle/>
           <a:p>
-            <a:pPr algn="ctr" indent="0" marL="0">
+            <a:pPr marL="0" indent="0" algn="ctr">
               <a:buNone/>
             </a:pPr>
             <a:r>
@@ -1840,7 +1595,7 @@
             <a:endParaRPr lang="en-US" sz="1400" dirty="0"/>
           </a:p>
           <a:p>
-            <a:pPr algn="ctr" indent="0" marL="0">
+            <a:pPr marL="0" indent="0" algn="ctr">
               <a:buNone/>
             </a:pPr>
             <a:r>
@@ -1881,7 +1636,7 @@
           </a:bodyPr>
           <a:lstStyle/>
           <a:p>
-            <a:pPr algn="ctr" indent="0" marL="0">
+            <a:pPr marL="0" indent="0" algn="ctr">
               <a:buNone/>
             </a:pPr>
             <a:r>
@@ -1949,7 +1704,7 @@
           </a:bodyPr>
           <a:lstStyle/>
           <a:p>
-            <a:pPr algn="ctr" indent="0" marL="0">
+            <a:pPr marL="0" indent="0" algn="ctr">
               <a:buNone/>
             </a:pPr>
             <a:r>
@@ -2017,7 +1772,7 @@
           </a:bodyPr>
           <a:lstStyle/>
           <a:p>
-            <a:pPr algn="l" indent="0" marL="0">
+            <a:pPr marL="0" indent="0" algn="l">
               <a:buNone/>
             </a:pPr>
             <a:r>
@@ -2085,7 +1840,7 @@
           </a:bodyPr>
           <a:lstStyle/>
           <a:p>
-            <a:pPr algn="l" indent="0" marL="0">
+            <a:pPr marL="0" indent="0" algn="l">
               <a:buNone/>
             </a:pPr>
             <a:r>
@@ -2153,7 +1908,7 @@
           </a:bodyPr>
           <a:lstStyle/>
           <a:p>
-            <a:pPr algn="ctr" indent="0" marL="0">
+            <a:pPr marL="0" indent="0" algn="ctr">
               <a:buNone/>
             </a:pPr>
             <a:r>
@@ -2221,7 +1976,7 @@
           </a:bodyPr>
           <a:lstStyle/>
           <a:p>
-            <a:pPr algn="l" indent="0" marL="0">
+            <a:pPr marL="0" indent="0" algn="l">
               <a:buNone/>
             </a:pPr>
             <a:r>
@@ -2289,7 +2044,7 @@
           </a:bodyPr>
           <a:lstStyle/>
           <a:p>
-            <a:pPr algn="l" indent="0" marL="0">
+            <a:pPr marL="0" indent="0" algn="l">
               <a:buNone/>
             </a:pPr>
             <a:r>
@@ -2357,7 +2112,7 @@
           </a:bodyPr>
           <a:lstStyle/>
           <a:p>
-            <a:pPr algn="ctr" indent="0" marL="0">
+            <a:pPr marL="0" indent="0" algn="ctr">
               <a:buNone/>
             </a:pPr>
             <a:r>
@@ -2425,7 +2180,7 @@
           </a:bodyPr>
           <a:lstStyle/>
           <a:p>
-            <a:pPr algn="l" indent="0" marL="0">
+            <a:pPr marL="0" indent="0" algn="l">
               <a:buNone/>
             </a:pPr>
             <a:r>
@@ -2493,7 +2248,7 @@
           </a:bodyPr>
           <a:lstStyle/>
           <a:p>
-            <a:pPr algn="l" indent="0" marL="0">
+            <a:pPr marL="0" indent="0" algn="l">
               <a:buNone/>
             </a:pPr>
             <a:r>
@@ -2561,7 +2316,7 @@
           </a:bodyPr>
           <a:lstStyle/>
           <a:p>
-            <a:pPr algn="ctr" indent="0" marL="0">
+            <a:pPr marL="0" indent="0" algn="ctr">
               <a:buNone/>
             </a:pPr>
             <a:r>
@@ -2629,7 +2384,7 @@
           </a:bodyPr>
           <a:lstStyle/>
           <a:p>
-            <a:pPr algn="l" indent="0" marL="0">
+            <a:pPr marL="0" indent="0" algn="l">
               <a:buNone/>
             </a:pPr>
             <a:r>
@@ -2697,7 +2452,7 @@
           </a:bodyPr>
           <a:lstStyle/>
           <a:p>
-            <a:pPr algn="l" indent="0" marL="0">
+            <a:pPr marL="0" indent="0" algn="l">
               <a:buNone/>
             </a:pPr>
             <a:r>
@@ -2765,7 +2520,7 @@
           </a:bodyPr>
           <a:lstStyle/>
           <a:p>
-            <a:pPr algn="ctr" indent="0" marL="0">
+            <a:pPr marL="0" indent="0" algn="ctr">
               <a:buNone/>
             </a:pPr>
             <a:r>
@@ -2833,7 +2588,7 @@
           </a:bodyPr>
           <a:lstStyle/>
           <a:p>
-            <a:pPr algn="l" indent="0" marL="0">
+            <a:pPr marL="0" indent="0" algn="l">
               <a:buNone/>
             </a:pPr>
             <a:r>
@@ -2901,7 +2656,7 @@
           </a:bodyPr>
           <a:lstStyle/>
           <a:p>
-            <a:pPr algn="l" indent="0" marL="0">
+            <a:pPr marL="0" indent="0" algn="l">
               <a:buNone/>
             </a:pPr>
             <a:r>
@@ -2935,6 +2690,7 @@
         <a:solidFill>
           <a:srgbClr val="F8FAFC"/>
         </a:solidFill>
+        <a:effectLst/>
       </p:bgPr>
     </p:bg>
     <p:spTree>
@@ -2974,7 +2730,7 @@
           </a:bodyPr>
           <a:lstStyle/>
           <a:p>
-            <a:pPr indent="0" marL="0">
+            <a:pPr marL="0" indent="0">
               <a:buNone/>
             </a:pPr>
             <a:r>
@@ -3015,7 +2771,7 @@
           </a:bodyPr>
           <a:lstStyle/>
           <a:p>
-            <a:pPr indent="0" marL="0">
+            <a:pPr marL="0" indent="0">
               <a:buNone/>
             </a:pPr>
             <a:r>
@@ -3106,7 +2862,7 @@
           </a:bodyPr>
           <a:lstStyle/>
           <a:p>
-            <a:pPr algn="ctr" indent="0" marL="0">
+            <a:pPr marL="0" indent="0" algn="ctr">
               <a:buNone/>
             </a:pPr>
             <a:r>
@@ -3123,7 +2879,7 @@
             <a:endParaRPr lang="en-US" sz="960" dirty="0"/>
           </a:p>
           <a:p>
-            <a:pPr algn="ctr" indent="0" marL="0">
+            <a:pPr marL="0" indent="0" algn="ctr">
               <a:buNone/>
             </a:pPr>
             <a:r>
@@ -3216,7 +2972,7 @@
           </a:bodyPr>
           <a:lstStyle/>
           <a:p>
-            <a:pPr algn="ctr" indent="0" marL="0">
+            <a:pPr marL="0" indent="0" algn="ctr">
               <a:buNone/>
             </a:pPr>
             <a:r>
@@ -3233,7 +2989,7 @@
             <a:endParaRPr lang="en-US" sz="960" dirty="0"/>
           </a:p>
           <a:p>
-            <a:pPr algn="ctr" indent="0" marL="0">
+            <a:pPr marL="0" indent="0" algn="ctr">
               <a:buNone/>
             </a:pPr>
             <a:r>
@@ -3326,7 +3082,7 @@
           </a:bodyPr>
           <a:lstStyle/>
           <a:p>
-            <a:pPr algn="ctr" indent="0" marL="0">
+            <a:pPr marL="0" indent="0" algn="ctr">
               <a:buNone/>
             </a:pPr>
             <a:r>
@@ -3343,7 +3099,7 @@
             <a:endParaRPr lang="en-US" sz="960" dirty="0"/>
           </a:p>
           <a:p>
-            <a:pPr algn="ctr" indent="0" marL="0">
+            <a:pPr marL="0" indent="0" algn="ctr">
               <a:buNone/>
             </a:pPr>
             <a:r>
@@ -3436,7 +3192,7 @@
           </a:bodyPr>
           <a:lstStyle/>
           <a:p>
-            <a:pPr algn="ctr" indent="0" marL="0">
+            <a:pPr marL="0" indent="0" algn="ctr">
               <a:buNone/>
             </a:pPr>
             <a:r>
@@ -3453,7 +3209,7 @@
             <a:endParaRPr lang="en-US" sz="960" dirty="0"/>
           </a:p>
           <a:p>
-            <a:pPr algn="ctr" indent="0" marL="0">
+            <a:pPr marL="0" indent="0" algn="ctr">
               <a:buNone/>
             </a:pPr>
             <a:r>
@@ -3546,7 +3302,7 @@
           </a:bodyPr>
           <a:lstStyle/>
           <a:p>
-            <a:pPr algn="ctr" indent="0" marL="0">
+            <a:pPr marL="0" indent="0" algn="ctr">
               <a:buNone/>
             </a:pPr>
             <a:r>
@@ -3563,7 +3319,7 @@
             <a:endParaRPr lang="en-US" sz="960" dirty="0"/>
           </a:p>
           <a:p>
-            <a:pPr algn="ctr" indent="0" marL="0">
+            <a:pPr marL="0" indent="0" algn="ctr">
               <a:buNone/>
             </a:pPr>
             <a:r>
@@ -3656,7 +3412,7 @@
           </a:bodyPr>
           <a:lstStyle/>
           <a:p>
-            <a:pPr algn="ctr" indent="0" marL="0">
+            <a:pPr marL="0" indent="0" algn="ctr">
               <a:buNone/>
             </a:pPr>
             <a:r>
@@ -3673,7 +3429,7 @@
             <a:endParaRPr lang="en-US" sz="960" dirty="0"/>
           </a:p>
           <a:p>
-            <a:pPr algn="ctr" indent="0" marL="0">
+            <a:pPr marL="0" indent="0" algn="ctr">
               <a:buNone/>
             </a:pPr>
             <a:r>
@@ -3766,7 +3522,7 @@
           </a:bodyPr>
           <a:lstStyle/>
           <a:p>
-            <a:pPr algn="ctr" indent="0" marL="0">
+            <a:pPr marL="0" indent="0" algn="ctr">
               <a:buNone/>
             </a:pPr>
             <a:r>
@@ -3783,7 +3539,7 @@
             <a:endParaRPr lang="en-US" sz="960" dirty="0"/>
           </a:p>
           <a:p>
-            <a:pPr algn="ctr" indent="0" marL="0">
+            <a:pPr marL="0" indent="0" algn="ctr">
               <a:buNone/>
             </a:pPr>
             <a:r>
@@ -3876,7 +3632,7 @@
           </a:bodyPr>
           <a:lstStyle/>
           <a:p>
-            <a:pPr algn="ctr" indent="0" marL="0">
+            <a:pPr marL="0" indent="0" algn="ctr">
               <a:buNone/>
             </a:pPr>
             <a:r>
@@ -3893,7 +3649,7 @@
             <a:endParaRPr lang="en-US" sz="960" dirty="0"/>
           </a:p>
           <a:p>
-            <a:pPr algn="ctr" indent="0" marL="0">
+            <a:pPr marL="0" indent="0" algn="ctr">
               <a:buNone/>
             </a:pPr>
             <a:r>
@@ -3961,7 +3717,7 @@
           </a:bodyPr>
           <a:lstStyle/>
           <a:p>
-            <a:pPr algn="ctr" indent="0" marL="0">
+            <a:pPr marL="0" indent="0" algn="ctr">
               <a:buNone/>
             </a:pPr>
             <a:r>
@@ -4029,7 +3785,7 @@
           </a:bodyPr>
           <a:lstStyle/>
           <a:p>
-            <a:pPr algn="ctr" indent="0" marL="0">
+            <a:pPr marL="0" indent="0" algn="ctr">
               <a:buNone/>
             </a:pPr>
             <a:r>
@@ -4097,7 +3853,7 @@
           </a:bodyPr>
           <a:lstStyle/>
           <a:p>
-            <a:pPr algn="ctr" indent="0" marL="0">
+            <a:pPr marL="0" indent="0" algn="ctr">
               <a:buNone/>
             </a:pPr>
             <a:r>
@@ -4165,7 +3921,7 @@
           </a:bodyPr>
           <a:lstStyle/>
           <a:p>
-            <a:pPr algn="ctr" indent="0" marL="0">
+            <a:pPr marL="0" indent="0" algn="ctr">
               <a:buNone/>
             </a:pPr>
             <a:r>
@@ -4233,7 +3989,7 @@
           </a:bodyPr>
           <a:lstStyle/>
           <a:p>
-            <a:pPr algn="ctr" indent="0" marL="0">
+            <a:pPr marL="0" indent="0" algn="ctr">
               <a:buNone/>
             </a:pPr>
             <a:r>
@@ -4301,7 +4057,7 @@
           </a:bodyPr>
           <a:lstStyle/>
           <a:p>
-            <a:pPr algn="ctr" indent="0" marL="0">
+            <a:pPr marL="0" indent="0" algn="ctr">
               <a:buNone/>
             </a:pPr>
             <a:r>
@@ -4369,7 +4125,7 @@
           </a:bodyPr>
           <a:lstStyle/>
           <a:p>
-            <a:pPr algn="ctr" indent="0" marL="0">
+            <a:pPr marL="0" indent="0" algn="ctr">
               <a:buNone/>
             </a:pPr>
             <a:r>
@@ -4386,7 +4142,7 @@
             <a:endParaRPr lang="en-US" sz="1200" dirty="0"/>
           </a:p>
           <a:p>
-            <a:pPr algn="ctr" indent="0" marL="0">
+            <a:pPr marL="0" indent="0" algn="ctr">
               <a:buNone/>
             </a:pPr>
             <a:r>
@@ -4454,7 +4210,7 @@
           </a:bodyPr>
           <a:lstStyle/>
           <a:p>
-            <a:pPr algn="ctr" indent="0" marL="0">
+            <a:pPr marL="0" indent="0" algn="ctr">
               <a:buNone/>
             </a:pPr>
             <a:r>
@@ -4471,7 +4227,7 @@
             <a:endParaRPr lang="en-US" sz="1200" dirty="0"/>
           </a:p>
           <a:p>
-            <a:pPr algn="ctr" indent="0" marL="0">
+            <a:pPr marL="0" indent="0" algn="ctr">
               <a:buNone/>
             </a:pPr>
             <a:r>
@@ -4539,7 +4295,7 @@
           </a:bodyPr>
           <a:lstStyle/>
           <a:p>
-            <a:pPr algn="ctr" indent="0" marL="0">
+            <a:pPr marL="0" indent="0" algn="ctr">
               <a:buNone/>
             </a:pPr>
             <a:r>
@@ -4556,7 +4312,7 @@
             <a:endParaRPr lang="en-US" sz="1200" dirty="0"/>
           </a:p>
           <a:p>
-            <a:pPr algn="ctr" indent="0" marL="0">
+            <a:pPr marL="0" indent="0" algn="ctr">
               <a:buNone/>
             </a:pPr>
             <a:r>
@@ -4597,7 +4353,7 @@
           </a:bodyPr>
           <a:lstStyle/>
           <a:p>
-            <a:pPr algn="ctr" indent="0" marL="0">
+            <a:pPr marL="0" indent="0" algn="ctr">
               <a:buNone/>
             </a:pPr>
             <a:r>
@@ -4631,6 +4387,7 @@
         <a:solidFill>
           <a:srgbClr val="F8FAFC"/>
         </a:solidFill>
+        <a:effectLst/>
       </p:bgPr>
     </p:bg>
     <p:spTree>
@@ -4670,7 +4427,7 @@
           </a:bodyPr>
           <a:lstStyle/>
           <a:p>
-            <a:pPr indent="0" marL="0">
+            <a:pPr marL="0" indent="0">
               <a:buNone/>
             </a:pPr>
             <a:r>
@@ -4711,7 +4468,7 @@
           </a:bodyPr>
           <a:lstStyle/>
           <a:p>
-            <a:pPr indent="0" marL="0">
+            <a:pPr marL="0" indent="0">
               <a:buNone/>
             </a:pPr>
             <a:r>
@@ -4802,7 +4559,7 @@
           </a:bodyPr>
           <a:lstStyle/>
           <a:p>
-            <a:pPr algn="ctr" indent="0" marL="0">
+            <a:pPr marL="0" indent="0" algn="ctr">
               <a:buNone/>
             </a:pPr>
             <a:r>
@@ -4819,7 +4576,7 @@
             <a:endParaRPr lang="en-US" sz="1300" dirty="0"/>
           </a:p>
           <a:p>
-            <a:pPr algn="ctr" indent="0" marL="0">
+            <a:pPr marL="0" indent="0" algn="ctr">
               <a:buNone/>
             </a:pPr>
             <a:r>
@@ -4887,7 +4644,7 @@
           </a:bodyPr>
           <a:lstStyle/>
           <a:p>
-            <a:pPr algn="ctr" indent="0" marL="0">
+            <a:pPr marL="0" indent="0" algn="ctr">
               <a:buNone/>
             </a:pPr>
             <a:r>
@@ -4904,7 +4661,7 @@
             <a:endParaRPr lang="en-US" sz="1300" dirty="0"/>
           </a:p>
           <a:p>
-            <a:pPr algn="ctr" indent="0" marL="0">
+            <a:pPr marL="0" indent="0" algn="ctr">
               <a:buNone/>
             </a:pPr>
             <a:r>
@@ -4972,7 +4729,7 @@
           </a:bodyPr>
           <a:lstStyle/>
           <a:p>
-            <a:pPr algn="ctr" indent="0" marL="0">
+            <a:pPr marL="0" indent="0" algn="ctr">
               <a:buNone/>
             </a:pPr>
             <a:r>
@@ -4989,7 +4746,7 @@
             <a:endParaRPr lang="en-US" sz="1300" dirty="0"/>
           </a:p>
           <a:p>
-            <a:pPr algn="ctr" indent="0" marL="0">
+            <a:pPr marL="0" indent="0" algn="ctr">
               <a:buNone/>
             </a:pPr>
             <a:r>
@@ -5057,7 +4814,7 @@
           </a:bodyPr>
           <a:lstStyle/>
           <a:p>
-            <a:pPr algn="ctr" indent="0" marL="0">
+            <a:pPr marL="0" indent="0" algn="ctr">
               <a:buNone/>
             </a:pPr>
             <a:r>
@@ -5074,7 +4831,7 @@
             <a:endParaRPr lang="en-US" sz="1300" dirty="0"/>
           </a:p>
           <a:p>
-            <a:pPr algn="ctr" indent="0" marL="0">
+            <a:pPr marL="0" indent="0" algn="ctr">
               <a:buNone/>
             </a:pPr>
             <a:r>
@@ -5142,7 +4899,7 @@
           </a:bodyPr>
           <a:lstStyle/>
           <a:p>
-            <a:pPr algn="ctr" indent="0" marL="0">
+            <a:pPr marL="0" indent="0" algn="ctr">
               <a:buNone/>
             </a:pPr>
             <a:r>
@@ -5159,7 +4916,7 @@
             <a:endParaRPr lang="en-US" sz="1300" dirty="0"/>
           </a:p>
           <a:p>
-            <a:pPr algn="ctr" indent="0" marL="0">
+            <a:pPr marL="0" indent="0" algn="ctr">
               <a:buNone/>
             </a:pPr>
             <a:r>
@@ -5211,7 +4968,7 @@
         <p:spPr>
           <a:xfrm>
             <a:off x="2834640" y="3566160"/>
-            <a:ext cx="822960" cy="-731520"/>
+            <a:ext cx="822960" cy="0"/>
           </a:xfrm>
           <a:prstGeom prst="line">
             <a:avLst/>
@@ -5300,7 +5057,7 @@
           </a:bodyPr>
           <a:lstStyle/>
           <a:p>
-            <a:pPr algn="ctr" indent="0" marL="0">
+            <a:pPr marL="0" indent="0" algn="ctr">
               <a:buNone/>
             </a:pPr>
             <a:r>
@@ -5368,7 +5125,7 @@
           </a:bodyPr>
           <a:lstStyle/>
           <a:p>
-            <a:pPr algn="ctr" indent="0" marL="0">
+            <a:pPr marL="0" indent="0" algn="ctr">
               <a:buNone/>
             </a:pPr>
             <a:r>
@@ -5436,7 +5193,7 @@
           </a:bodyPr>
           <a:lstStyle/>
           <a:p>
-            <a:pPr algn="l" indent="0" marL="0">
+            <a:pPr marL="0" indent="0" algn="l">
               <a:buNone/>
             </a:pPr>
             <a:r>
@@ -5504,7 +5261,7 @@
           </a:bodyPr>
           <a:lstStyle/>
           <a:p>
-            <a:pPr algn="ctr" indent="0" marL="0">
+            <a:pPr marL="0" indent="0" algn="ctr">
               <a:buNone/>
             </a:pPr>
             <a:r>
@@ -5572,7 +5329,7 @@
           </a:bodyPr>
           <a:lstStyle/>
           <a:p>
-            <a:pPr algn="l" indent="0" marL="0">
+            <a:pPr marL="0" indent="0" algn="l">
               <a:buNone/>
             </a:pPr>
             <a:r>
@@ -5606,6 +5363,7 @@
         <a:solidFill>
           <a:srgbClr val="F8FAFC"/>
         </a:solidFill>
+        <a:effectLst/>
       </p:bgPr>
     </p:bg>
     <p:spTree>
@@ -5645,7 +5403,7 @@
           </a:bodyPr>
           <a:lstStyle/>
           <a:p>
-            <a:pPr indent="0" marL="0">
+            <a:pPr marL="0" indent="0">
               <a:buNone/>
             </a:pPr>
             <a:r>
@@ -5686,7 +5444,7 @@
           </a:bodyPr>
           <a:lstStyle/>
           <a:p>
-            <a:pPr indent="0" marL="0">
+            <a:pPr marL="0" indent="0">
               <a:buNone/>
             </a:pPr>
             <a:r>
@@ -5777,7 +5535,7 @@
           </a:bodyPr>
           <a:lstStyle/>
           <a:p>
-            <a:pPr algn="ctr" indent="0" marL="0">
+            <a:pPr marL="0" indent="0" algn="ctr">
               <a:buNone/>
             </a:pPr>
             <a:r>
@@ -5845,7 +5603,7 @@
           </a:bodyPr>
           <a:lstStyle/>
           <a:p>
-            <a:pPr algn="l" indent="0" marL="0">
+            <a:pPr marL="0" indent="0" algn="l">
               <a:buNone/>
             </a:pPr>
             <a:r>
@@ -5913,7 +5671,7 @@
           </a:bodyPr>
           <a:lstStyle/>
           <a:p>
-            <a:pPr algn="l" indent="0" marL="0">
+            <a:pPr marL="0" indent="0" algn="l">
               <a:buNone/>
             </a:pPr>
             <a:r>
@@ -5981,7 +5739,7 @@
           </a:bodyPr>
           <a:lstStyle/>
           <a:p>
-            <a:pPr algn="l" indent="0" marL="0">
+            <a:pPr marL="0" indent="0" algn="l">
               <a:buNone/>
             </a:pPr>
             <a:r>
@@ -6049,7 +5807,7 @@
           </a:bodyPr>
           <a:lstStyle/>
           <a:p>
-            <a:pPr algn="ctr" indent="0" marL="0">
+            <a:pPr marL="0" indent="0" algn="ctr">
               <a:buNone/>
             </a:pPr>
             <a:r>
@@ -6117,7 +5875,7 @@
           </a:bodyPr>
           <a:lstStyle/>
           <a:p>
-            <a:pPr algn="l" indent="0" marL="0">
+            <a:pPr marL="0" indent="0" algn="l">
               <a:buNone/>
             </a:pPr>
             <a:r>
@@ -6185,7 +5943,7 @@
           </a:bodyPr>
           <a:lstStyle/>
           <a:p>
-            <a:pPr algn="l" indent="0" marL="0">
+            <a:pPr marL="0" indent="0" algn="l">
               <a:buNone/>
             </a:pPr>
             <a:r>
@@ -6253,7 +6011,7 @@
           </a:bodyPr>
           <a:lstStyle/>
           <a:p>
-            <a:pPr algn="l" indent="0" marL="0">
+            <a:pPr marL="0" indent="0" algn="l">
               <a:buNone/>
             </a:pPr>
             <a:r>
@@ -6321,7 +6079,7 @@
           </a:bodyPr>
           <a:lstStyle/>
           <a:p>
-            <a:pPr algn="ctr" indent="0" marL="0">
+            <a:pPr marL="0" indent="0" algn="ctr">
               <a:buNone/>
             </a:pPr>
             <a:r>
@@ -6389,7 +6147,7 @@
           </a:bodyPr>
           <a:lstStyle/>
           <a:p>
-            <a:pPr algn="l" indent="0" marL="0">
+            <a:pPr marL="0" indent="0" algn="l">
               <a:buNone/>
             </a:pPr>
             <a:r>
@@ -6457,7 +6215,7 @@
           </a:bodyPr>
           <a:lstStyle/>
           <a:p>
-            <a:pPr algn="l" indent="0" marL="0">
+            <a:pPr marL="0" indent="0" algn="l">
               <a:buNone/>
             </a:pPr>
             <a:r>
@@ -6525,7 +6283,7 @@
           </a:bodyPr>
           <a:lstStyle/>
           <a:p>
-            <a:pPr algn="l" indent="0" marL="0">
+            <a:pPr marL="0" indent="0" algn="l">
               <a:buNone/>
             </a:pPr>
             <a:r>
@@ -6593,7 +6351,7 @@
           </a:bodyPr>
           <a:lstStyle/>
           <a:p>
-            <a:pPr algn="ctr" indent="0" marL="0">
+            <a:pPr marL="0" indent="0" algn="ctr">
               <a:buNone/>
             </a:pPr>
             <a:r>
@@ -6661,7 +6419,7 @@
           </a:bodyPr>
           <a:lstStyle/>
           <a:p>
-            <a:pPr algn="l" indent="0" marL="0">
+            <a:pPr marL="0" indent="0" algn="l">
               <a:buNone/>
             </a:pPr>
             <a:r>
@@ -6729,7 +6487,7 @@
           </a:bodyPr>
           <a:lstStyle/>
           <a:p>
-            <a:pPr algn="l" indent="0" marL="0">
+            <a:pPr marL="0" indent="0" algn="l">
               <a:buNone/>
             </a:pPr>
             <a:r>
@@ -6797,7 +6555,7 @@
           </a:bodyPr>
           <a:lstStyle/>
           <a:p>
-            <a:pPr algn="l" indent="0" marL="0">
+            <a:pPr marL="0" indent="0" algn="l">
               <a:buNone/>
             </a:pPr>
             <a:r>
@@ -6865,7 +6623,7 @@
           </a:bodyPr>
           <a:lstStyle/>
           <a:p>
-            <a:pPr algn="ctr" indent="0" marL="0">
+            <a:pPr marL="0" indent="0" algn="ctr">
               <a:buNone/>
             </a:pPr>
             <a:r>
@@ -6933,7 +6691,7 @@
           </a:bodyPr>
           <a:lstStyle/>
           <a:p>
-            <a:pPr algn="l" indent="0" marL="0">
+            <a:pPr marL="0" indent="0" algn="l">
               <a:buNone/>
             </a:pPr>
             <a:r>
@@ -7001,7 +6759,7 @@
           </a:bodyPr>
           <a:lstStyle/>
           <a:p>
-            <a:pPr algn="l" indent="0" marL="0">
+            <a:pPr marL="0" indent="0" algn="l">
               <a:buNone/>
             </a:pPr>
             <a:r>
@@ -7069,7 +6827,7 @@
           </a:bodyPr>
           <a:lstStyle/>
           <a:p>
-            <a:pPr algn="l" indent="0" marL="0">
+            <a:pPr marL="0" indent="0" algn="l">
               <a:buNone/>
             </a:pPr>
             <a:r>
@@ -7137,7 +6895,7 @@
           </a:bodyPr>
           <a:lstStyle/>
           <a:p>
-            <a:pPr algn="ctr" indent="0" marL="0">
+            <a:pPr marL="0" indent="0" algn="ctr">
               <a:buNone/>
             </a:pPr>
             <a:r>
@@ -7205,7 +6963,7 @@
           </a:bodyPr>
           <a:lstStyle/>
           <a:p>
-            <a:pPr algn="l" indent="0" marL="0">
+            <a:pPr marL="0" indent="0" algn="l">
               <a:buNone/>
             </a:pPr>
             <a:r>
@@ -7273,7 +7031,7 @@
           </a:bodyPr>
           <a:lstStyle/>
           <a:p>
-            <a:pPr algn="l" indent="0" marL="0">
+            <a:pPr marL="0" indent="0" algn="l">
               <a:buNone/>
             </a:pPr>
             <a:r>
@@ -7341,7 +7099,7 @@
           </a:bodyPr>
           <a:lstStyle/>
           <a:p>
-            <a:pPr algn="l" indent="0" marL="0">
+            <a:pPr marL="0" indent="0" algn="l">
               <a:buNone/>
             </a:pPr>
             <a:r>
@@ -7409,7 +7167,7 @@
           </a:bodyPr>
           <a:lstStyle/>
           <a:p>
-            <a:pPr algn="ctr" indent="0" marL="0">
+            <a:pPr marL="0" indent="0" algn="ctr">
               <a:buNone/>
             </a:pPr>
             <a:r>
@@ -7477,7 +7235,7 @@
           </a:bodyPr>
           <a:lstStyle/>
           <a:p>
-            <a:pPr algn="l" indent="0" marL="0">
+            <a:pPr marL="0" indent="0" algn="l">
               <a:buNone/>
             </a:pPr>
             <a:r>
@@ -7545,7 +7303,7 @@
           </a:bodyPr>
           <a:lstStyle/>
           <a:p>
-            <a:pPr algn="l" indent="0" marL="0">
+            <a:pPr marL="0" indent="0" algn="l">
               <a:buNone/>
             </a:pPr>
             <a:r>
@@ -7613,7 +7371,7 @@
           </a:bodyPr>
           <a:lstStyle/>
           <a:p>
-            <a:pPr algn="l" indent="0" marL="0">
+            <a:pPr marL="0" indent="0" algn="l">
               <a:buNone/>
             </a:pPr>
             <a:r>
@@ -7681,7 +7439,7 @@
           </a:bodyPr>
           <a:lstStyle/>
           <a:p>
-            <a:pPr algn="ctr" indent="0" marL="0">
+            <a:pPr marL="0" indent="0" algn="ctr">
               <a:buNone/>
             </a:pPr>
             <a:r>
@@ -7774,7 +7532,7 @@
           </a:bodyPr>
           <a:lstStyle/>
           <a:p>
-            <a:pPr algn="ctr" indent="0" marL="0">
+            <a:pPr marL="0" indent="0" algn="ctr">
               <a:buNone/>
             </a:pPr>
             <a:r>
@@ -7867,7 +7625,7 @@
           </a:bodyPr>
           <a:lstStyle/>
           <a:p>
-            <a:pPr algn="ctr" indent="0" marL="0">
+            <a:pPr marL="0" indent="0" algn="ctr">
               <a:buNone/>
             </a:pPr>
             <a:r>
@@ -7884,7 +7642,7 @@
             <a:endParaRPr lang="en-US" sz="1250" dirty="0"/>
           </a:p>
           <a:p>
-            <a:pPr algn="ctr" indent="0" marL="0">
+            <a:pPr marL="0" indent="0" algn="ctr">
               <a:buNone/>
             </a:pPr>
             <a:r>
@@ -7918,6 +7676,7 @@
         <a:solidFill>
           <a:srgbClr val="F8FAFC"/>
         </a:solidFill>
+        <a:effectLst/>
       </p:bgPr>
     </p:bg>
     <p:spTree>
@@ -7957,7 +7716,7 @@
           </a:bodyPr>
           <a:lstStyle/>
           <a:p>
-            <a:pPr indent="0" marL="0">
+            <a:pPr marL="0" indent="0">
               <a:buNone/>
             </a:pPr>
             <a:r>
@@ -7998,7 +7757,7 @@
           </a:bodyPr>
           <a:lstStyle/>
           <a:p>
-            <a:pPr indent="0" marL="0">
+            <a:pPr marL="0" indent="0">
               <a:buNone/>
             </a:pPr>
             <a:r>
@@ -8089,7 +7848,7 @@
           </a:bodyPr>
           <a:lstStyle/>
           <a:p>
-            <a:pPr algn="ctr" indent="0" marL="0">
+            <a:pPr marL="0" indent="0" algn="ctr">
               <a:buNone/>
             </a:pPr>
             <a:r>
@@ -8182,7 +7941,7 @@
           </a:bodyPr>
           <a:lstStyle/>
           <a:p>
-            <a:pPr algn="ctr" indent="0" marL="0">
+            <a:pPr marL="0" indent="0" algn="ctr">
               <a:buNone/>
             </a:pPr>
             <a:r>
@@ -8275,7 +8034,7 @@
           </a:bodyPr>
           <a:lstStyle/>
           <a:p>
-            <a:pPr algn="ctr" indent="0" marL="0">
+            <a:pPr marL="0" indent="0" algn="ctr">
               <a:buNone/>
             </a:pPr>
             <a:r>
@@ -8368,7 +8127,7 @@
           </a:bodyPr>
           <a:lstStyle/>
           <a:p>
-            <a:pPr algn="ctr" indent="0" marL="0">
+            <a:pPr marL="0" indent="0" algn="ctr">
               <a:buNone/>
             </a:pPr>
             <a:r>
@@ -8385,7 +8144,7 @@
             <a:endParaRPr lang="en-US" sz="1100" dirty="0"/>
           </a:p>
           <a:p>
-            <a:pPr algn="ctr" indent="0" marL="0">
+            <a:pPr marL="0" indent="0" algn="ctr">
               <a:buNone/>
             </a:pPr>
             <a:r>
@@ -8453,7 +8212,7 @@
           </a:bodyPr>
           <a:lstStyle/>
           <a:p>
-            <a:pPr algn="ctr" indent="0" marL="0">
+            <a:pPr marL="0" indent="0" algn="ctr">
               <a:buNone/>
             </a:pPr>
             <a:r>
@@ -8546,7 +8305,7 @@
           </a:bodyPr>
           <a:lstStyle/>
           <a:p>
-            <a:pPr algn="ctr" indent="0" marL="0">
+            <a:pPr marL="0" indent="0" algn="ctr">
               <a:buNone/>
             </a:pPr>
             <a:r>
@@ -8563,7 +8322,7 @@
             <a:endParaRPr lang="en-US" sz="1100" dirty="0"/>
           </a:p>
           <a:p>
-            <a:pPr algn="ctr" indent="0" marL="0">
+            <a:pPr marL="0" indent="0" algn="ctr">
               <a:buNone/>
             </a:pPr>
             <a:r>
@@ -8631,7 +8390,7 @@
           </a:bodyPr>
           <a:lstStyle/>
           <a:p>
-            <a:pPr algn="ctr" indent="0" marL="0">
+            <a:pPr marL="0" indent="0" algn="ctr">
               <a:buNone/>
             </a:pPr>
             <a:r>
@@ -8724,7 +8483,7 @@
           </a:bodyPr>
           <a:lstStyle/>
           <a:p>
-            <a:pPr algn="ctr" indent="0" marL="0">
+            <a:pPr marL="0" indent="0" algn="ctr">
               <a:buNone/>
             </a:pPr>
             <a:r>
@@ -8741,7 +8500,7 @@
             <a:endParaRPr lang="en-US" sz="1100" dirty="0"/>
           </a:p>
           <a:p>
-            <a:pPr algn="ctr" indent="0" marL="0">
+            <a:pPr marL="0" indent="0" algn="ctr">
               <a:buNone/>
             </a:pPr>
             <a:r>
@@ -8809,7 +8568,7 @@
           </a:bodyPr>
           <a:lstStyle/>
           <a:p>
-            <a:pPr algn="ctr" indent="0" marL="0">
+            <a:pPr marL="0" indent="0" algn="ctr">
               <a:buNone/>
             </a:pPr>
             <a:r>
@@ -8902,7 +8661,7 @@
           </a:bodyPr>
           <a:lstStyle/>
           <a:p>
-            <a:pPr algn="ctr" indent="0" marL="0">
+            <a:pPr marL="0" indent="0" algn="ctr">
               <a:buNone/>
             </a:pPr>
             <a:r>
@@ -8919,7 +8678,7 @@
             <a:endParaRPr lang="en-US" sz="1100" dirty="0"/>
           </a:p>
           <a:p>
-            <a:pPr algn="ctr" indent="0" marL="0">
+            <a:pPr marL="0" indent="0" algn="ctr">
               <a:buNone/>
             </a:pPr>
             <a:r>
@@ -8987,7 +8746,7 @@
           </a:bodyPr>
           <a:lstStyle/>
           <a:p>
-            <a:pPr algn="ctr" indent="0" marL="0">
+            <a:pPr marL="0" indent="0" algn="ctr">
               <a:buNone/>
             </a:pPr>
             <a:r>
@@ -9055,7 +8814,7 @@
           </a:bodyPr>
           <a:lstStyle/>
           <a:p>
-            <a:pPr algn="ctr" indent="0" marL="0">
+            <a:pPr marL="0" indent="0" algn="ctr">
               <a:buNone/>
             </a:pPr>
             <a:r>
@@ -9123,7 +8882,7 @@
           </a:bodyPr>
           <a:lstStyle/>
           <a:p>
-            <a:pPr algn="ctr" indent="0" marL="0">
+            <a:pPr marL="0" indent="0" algn="ctr">
               <a:buNone/>
             </a:pPr>
             <a:r>
@@ -9157,6 +8916,7 @@
         <a:solidFill>
           <a:srgbClr val="F8FAFC"/>
         </a:solidFill>
+        <a:effectLst/>
       </p:bgPr>
     </p:bg>
     <p:spTree>
@@ -9196,7 +8956,7 @@
           </a:bodyPr>
           <a:lstStyle/>
           <a:p>
-            <a:pPr indent="0" marL="0">
+            <a:pPr marL="0" indent="0">
               <a:buNone/>
             </a:pPr>
             <a:r>
@@ -9237,7 +8997,7 @@
           </a:bodyPr>
           <a:lstStyle/>
           <a:p>
-            <a:pPr indent="0" marL="0">
+            <a:pPr marL="0" indent="0">
               <a:buNone/>
             </a:pPr>
             <a:r>
@@ -9328,7 +9088,7 @@
           </a:bodyPr>
           <a:lstStyle/>
           <a:p>
-            <a:pPr algn="ctr" indent="0" marL="0">
+            <a:pPr marL="0" indent="0" algn="ctr">
               <a:buNone/>
             </a:pPr>
             <a:r>
@@ -9396,7 +9156,7 @@
           </a:bodyPr>
           <a:lstStyle/>
           <a:p>
-            <a:pPr algn="l" indent="0" marL="0">
+            <a:pPr marL="0" indent="0" algn="l">
               <a:buNone/>
             </a:pPr>
             <a:r>
@@ -9464,7 +9224,7 @@
           </a:bodyPr>
           <a:lstStyle/>
           <a:p>
-            <a:pPr algn="l" indent="0" marL="0">
+            <a:pPr marL="0" indent="0" algn="l">
               <a:buNone/>
             </a:pPr>
             <a:r>
@@ -9532,7 +9292,7 @@
           </a:bodyPr>
           <a:lstStyle/>
           <a:p>
-            <a:pPr algn="ctr" indent="0" marL="0">
+            <a:pPr marL="0" indent="0" algn="ctr">
               <a:buNone/>
             </a:pPr>
             <a:r>
@@ -9600,7 +9360,7 @@
           </a:bodyPr>
           <a:lstStyle/>
           <a:p>
-            <a:pPr algn="l" indent="0" marL="0">
+            <a:pPr marL="0" indent="0" algn="l">
               <a:buNone/>
             </a:pPr>
             <a:r>
@@ -9668,7 +9428,7 @@
           </a:bodyPr>
           <a:lstStyle/>
           <a:p>
-            <a:pPr algn="l" indent="0" marL="0">
+            <a:pPr marL="0" indent="0" algn="l">
               <a:buNone/>
             </a:pPr>
             <a:r>
@@ -9736,7 +9496,7 @@
           </a:bodyPr>
           <a:lstStyle/>
           <a:p>
-            <a:pPr algn="ctr" indent="0" marL="0">
+            <a:pPr marL="0" indent="0" algn="ctr">
               <a:buNone/>
             </a:pPr>
             <a:r>
@@ -9804,7 +9564,7 @@
           </a:bodyPr>
           <a:lstStyle/>
           <a:p>
-            <a:pPr algn="l" indent="0" marL="0">
+            <a:pPr marL="0" indent="0" algn="l">
               <a:buNone/>
             </a:pPr>
             <a:r>
@@ -9872,7 +9632,7 @@
           </a:bodyPr>
           <a:lstStyle/>
           <a:p>
-            <a:pPr algn="l" indent="0" marL="0">
+            <a:pPr marL="0" indent="0" algn="l">
               <a:buNone/>
             </a:pPr>
             <a:r>
@@ -9940,7 +9700,7 @@
           </a:bodyPr>
           <a:lstStyle/>
           <a:p>
-            <a:pPr algn="ctr" indent="0" marL="0">
+            <a:pPr marL="0" indent="0" algn="ctr">
               <a:buNone/>
             </a:pPr>
             <a:r>
@@ -10008,7 +9768,7 @@
           </a:bodyPr>
           <a:lstStyle/>
           <a:p>
-            <a:pPr algn="l" indent="0" marL="0">
+            <a:pPr marL="0" indent="0" algn="l">
               <a:buNone/>
             </a:pPr>
             <a:r>
@@ -10076,7 +9836,7 @@
           </a:bodyPr>
           <a:lstStyle/>
           <a:p>
-            <a:pPr algn="l" indent="0" marL="0">
+            <a:pPr marL="0" indent="0" algn="l">
               <a:buNone/>
             </a:pPr>
             <a:r>
@@ -10144,7 +9904,7 @@
           </a:bodyPr>
           <a:lstStyle/>
           <a:p>
-            <a:pPr algn="ctr" indent="0" marL="0">
+            <a:pPr marL="0" indent="0" algn="ctr">
               <a:buNone/>
             </a:pPr>
             <a:r>
@@ -10212,7 +9972,7 @@
           </a:bodyPr>
           <a:lstStyle/>
           <a:p>
-            <a:pPr algn="l" indent="0" marL="0">
+            <a:pPr marL="0" indent="0" algn="l">
               <a:buNone/>
             </a:pPr>
             <a:r>
@@ -10280,7 +10040,7 @@
           </a:bodyPr>
           <a:lstStyle/>
           <a:p>
-            <a:pPr algn="l" indent="0" marL="0">
+            <a:pPr marL="0" indent="0" algn="l">
               <a:buNone/>
             </a:pPr>
             <a:r>
@@ -10348,7 +10108,7 @@
           </a:bodyPr>
           <a:lstStyle/>
           <a:p>
-            <a:pPr algn="ctr" indent="0" marL="0">
+            <a:pPr marL="0" indent="0" algn="ctr">
               <a:buNone/>
             </a:pPr>
             <a:r>
@@ -10416,7 +10176,7 @@
           </a:bodyPr>
           <a:lstStyle/>
           <a:p>
-            <a:pPr algn="l" indent="0" marL="0">
+            <a:pPr marL="0" indent="0" algn="l">
               <a:buNone/>
             </a:pPr>
             <a:r>
@@ -10484,7 +10244,7 @@
           </a:bodyPr>
           <a:lstStyle/>
           <a:p>
-            <a:pPr algn="l" indent="0" marL="0">
+            <a:pPr marL="0" indent="0" algn="l">
               <a:buNone/>
             </a:pPr>
             <a:r>
@@ -10552,7 +10312,7 @@
           </a:bodyPr>
           <a:lstStyle/>
           <a:p>
-            <a:pPr algn="ctr" indent="0" marL="0">
+            <a:pPr marL="0" indent="0" algn="ctr">
               <a:buNone/>
             </a:pPr>
             <a:r>
@@ -10569,7 +10329,7 @@
             <a:endParaRPr lang="en-US" sz="1300" dirty="0"/>
           </a:p>
           <a:p>
-            <a:pPr algn="ctr" indent="0" marL="0">
+            <a:pPr marL="0" indent="0" algn="ctr">
               <a:buNone/>
             </a:pPr>
             <a:r>
@@ -10637,7 +10397,7 @@
           </a:bodyPr>
           <a:lstStyle/>
           <a:p>
-            <a:pPr algn="ctr" indent="0" marL="0">
+            <a:pPr marL="0" indent="0" algn="ctr">
               <a:buNone/>
             </a:pPr>
             <a:r>
@@ -10654,7 +10414,7 @@
             <a:endParaRPr lang="en-US" sz="1300" dirty="0"/>
           </a:p>
           <a:p>
-            <a:pPr algn="ctr" indent="0" marL="0">
+            <a:pPr marL="0" indent="0" algn="ctr">
               <a:buNone/>
             </a:pPr>
             <a:r>
@@ -10722,7 +10482,7 @@
           </a:bodyPr>
           <a:lstStyle/>
           <a:p>
-            <a:pPr algn="ctr" indent="0" marL="0">
+            <a:pPr marL="0" indent="0" algn="ctr">
               <a:buNone/>
             </a:pPr>
             <a:r>
@@ -10739,7 +10499,7 @@
             <a:endParaRPr lang="en-US" sz="1300" dirty="0"/>
           </a:p>
           <a:p>
-            <a:pPr algn="ctr" indent="0" marL="0">
+            <a:pPr marL="0" indent="0" algn="ctr">
               <a:buNone/>
             </a:pPr>
             <a:r>
@@ -10773,6 +10533,7 @@
         <a:solidFill>
           <a:srgbClr val="F8FAFC"/>
         </a:solidFill>
+        <a:effectLst/>
       </p:bgPr>
     </p:bg>
     <p:spTree>
@@ -10812,7 +10573,7 @@
           </a:bodyPr>
           <a:lstStyle/>
           <a:p>
-            <a:pPr indent="0" marL="0">
+            <a:pPr marL="0" indent="0">
               <a:buNone/>
             </a:pPr>
             <a:r>
@@ -10853,7 +10614,7 @@
           </a:bodyPr>
           <a:lstStyle/>
           <a:p>
-            <a:pPr indent="0" marL="0">
+            <a:pPr marL="0" indent="0">
               <a:buNone/>
             </a:pPr>
             <a:r>
@@ -10944,7 +10705,7 @@
           </a:bodyPr>
           <a:lstStyle/>
           <a:p>
-            <a:pPr algn="ctr" indent="0" marL="0">
+            <a:pPr marL="0" indent="0" algn="ctr">
               <a:buNone/>
             </a:pPr>
             <a:r>
@@ -11012,7 +10773,7 @@
           </a:bodyPr>
           <a:lstStyle/>
           <a:p>
-            <a:pPr algn="l" indent="0" marL="0">
+            <a:pPr marL="0" indent="0" algn="l">
               <a:buNone/>
             </a:pPr>
             <a:r>
@@ -11080,7 +10841,7 @@
           </a:bodyPr>
           <a:lstStyle/>
           <a:p>
-            <a:pPr algn="l" indent="0" marL="0">
+            <a:pPr marL="0" indent="0" algn="l">
               <a:buNone/>
             </a:pPr>
             <a:r>
@@ -11148,7 +10909,7 @@
           </a:bodyPr>
           <a:lstStyle/>
           <a:p>
-            <a:pPr algn="ctr" indent="0" marL="0">
+            <a:pPr marL="0" indent="0" algn="ctr">
               <a:buNone/>
             </a:pPr>
             <a:r>
@@ -11216,7 +10977,7 @@
           </a:bodyPr>
           <a:lstStyle/>
           <a:p>
-            <a:pPr algn="l" indent="0" marL="0">
+            <a:pPr marL="0" indent="0" algn="l">
               <a:buNone/>
             </a:pPr>
             <a:r>
@@ -11284,7 +11045,7 @@
           </a:bodyPr>
           <a:lstStyle/>
           <a:p>
-            <a:pPr algn="l" indent="0" marL="0">
+            <a:pPr marL="0" indent="0" algn="l">
               <a:buNone/>
             </a:pPr>
             <a:r>
@@ -11352,7 +11113,7 @@
           </a:bodyPr>
           <a:lstStyle/>
           <a:p>
-            <a:pPr algn="ctr" indent="0" marL="0">
+            <a:pPr marL="0" indent="0" algn="ctr">
               <a:buNone/>
             </a:pPr>
             <a:r>
@@ -11420,7 +11181,7 @@
           </a:bodyPr>
           <a:lstStyle/>
           <a:p>
-            <a:pPr algn="l" indent="0" marL="0">
+            <a:pPr marL="0" indent="0" algn="l">
               <a:buNone/>
             </a:pPr>
             <a:r>
@@ -11488,7 +11249,7 @@
           </a:bodyPr>
           <a:lstStyle/>
           <a:p>
-            <a:pPr algn="l" indent="0" marL="0">
+            <a:pPr marL="0" indent="0" algn="l">
               <a:buNone/>
             </a:pPr>
             <a:r>
@@ -11556,7 +11317,7 @@
           </a:bodyPr>
           <a:lstStyle/>
           <a:p>
-            <a:pPr algn="ctr" indent="0" marL="0">
+            <a:pPr marL="0" indent="0" algn="ctr">
               <a:buNone/>
             </a:pPr>
             <a:r>
@@ -11624,7 +11385,7 @@
           </a:bodyPr>
           <a:lstStyle/>
           <a:p>
-            <a:pPr algn="l" indent="0" marL="0">
+            <a:pPr marL="0" indent="0" algn="l">
               <a:buNone/>
             </a:pPr>
             <a:r>
@@ -11692,7 +11453,7 @@
           </a:bodyPr>
           <a:lstStyle/>
           <a:p>
-            <a:pPr algn="l" indent="0" marL="0">
+            <a:pPr marL="0" indent="0" algn="l">
               <a:buNone/>
             </a:pPr>
             <a:r>
@@ -11760,7 +11521,7 @@
           </a:bodyPr>
           <a:lstStyle/>
           <a:p>
-            <a:pPr algn="ctr" indent="0" marL="0">
+            <a:pPr marL="0" indent="0" algn="ctr">
               <a:buNone/>
             </a:pPr>
             <a:r>
@@ -11828,7 +11589,7 @@
           </a:bodyPr>
           <a:lstStyle/>
           <a:p>
-            <a:pPr algn="l" indent="0" marL="0">
+            <a:pPr marL="0" indent="0" algn="l">
               <a:buNone/>
             </a:pPr>
             <a:r>
@@ -11896,7 +11657,7 @@
           </a:bodyPr>
           <a:lstStyle/>
           <a:p>
-            <a:pPr algn="l" indent="0" marL="0">
+            <a:pPr marL="0" indent="0" algn="l">
               <a:buNone/>
             </a:pPr>
             <a:r>
@@ -11964,7 +11725,7 @@
           </a:bodyPr>
           <a:lstStyle/>
           <a:p>
-            <a:pPr algn="ctr" indent="0" marL="0">
+            <a:pPr marL="0" indent="0" algn="ctr">
               <a:buNone/>
             </a:pPr>
             <a:r>
@@ -12032,7 +11793,7 @@
           </a:bodyPr>
           <a:lstStyle/>
           <a:p>
-            <a:pPr algn="l" indent="0" marL="0">
+            <a:pPr marL="0" indent="0" algn="l">
               <a:buNone/>
             </a:pPr>
             <a:r>
@@ -12100,7 +11861,7 @@
           </a:bodyPr>
           <a:lstStyle/>
           <a:p>
-            <a:pPr algn="l" indent="0" marL="0">
+            <a:pPr marL="0" indent="0" algn="l">
               <a:buNone/>
             </a:pPr>
             <a:r>
@@ -12168,7 +11929,7 @@
           </a:bodyPr>
           <a:lstStyle/>
           <a:p>
-            <a:pPr algn="ctr" indent="0" marL="0">
+            <a:pPr marL="0" indent="0" algn="ctr">
               <a:buNone/>
             </a:pPr>
             <a:r>
@@ -12185,7 +11946,7 @@
             <a:endParaRPr lang="en-US" sz="1250" dirty="0"/>
           </a:p>
           <a:p>
-            <a:pPr algn="ctr" indent="0" marL="0">
+            <a:pPr marL="0" indent="0" algn="ctr">
               <a:buNone/>
             </a:pPr>
             <a:r>
@@ -12253,7 +12014,7 @@
           </a:bodyPr>
           <a:lstStyle/>
           <a:p>
-            <a:pPr algn="ctr" indent="0" marL="0">
+            <a:pPr marL="0" indent="0" algn="ctr">
               <a:buNone/>
             </a:pPr>
             <a:r>
@@ -12270,7 +12031,7 @@
             <a:endParaRPr lang="en-US" sz="1250" dirty="0"/>
           </a:p>
           <a:p>
-            <a:pPr algn="ctr" indent="0" marL="0">
+            <a:pPr marL="0" indent="0" algn="ctr">
               <a:buNone/>
             </a:pPr>
             <a:r>
@@ -12338,7 +12099,7 @@
           </a:bodyPr>
           <a:lstStyle/>
           <a:p>
-            <a:pPr algn="ctr" indent="0" marL="0">
+            <a:pPr marL="0" indent="0" algn="ctr">
               <a:buNone/>
             </a:pPr>
             <a:r>
@@ -12355,7 +12116,7 @@
             <a:endParaRPr lang="en-US" sz="1250" dirty="0"/>
           </a:p>
           <a:p>
-            <a:pPr algn="ctr" indent="0" marL="0">
+            <a:pPr marL="0" indent="0" algn="ctr">
               <a:buNone/>
             </a:pPr>
             <a:r>
@@ -12389,6 +12150,7 @@
         <a:solidFill>
           <a:srgbClr val="F8FAFC"/>
         </a:solidFill>
+        <a:effectLst/>
       </p:bgPr>
     </p:bg>
     <p:spTree>
@@ -12428,7 +12190,7 @@
           </a:bodyPr>
           <a:lstStyle/>
           <a:p>
-            <a:pPr indent="0" marL="0">
+            <a:pPr marL="0" indent="0">
               <a:buNone/>
             </a:pPr>
             <a:r>
@@ -12469,7 +12231,7 @@
           </a:bodyPr>
           <a:lstStyle/>
           <a:p>
-            <a:pPr indent="0" marL="0">
+            <a:pPr marL="0" indent="0">
               <a:buNone/>
             </a:pPr>
             <a:r>
@@ -12560,7 +12322,7 @@
           </a:bodyPr>
           <a:lstStyle/>
           <a:p>
-            <a:pPr algn="ctr" indent="0" marL="0">
+            <a:pPr marL="0" indent="0" algn="ctr">
               <a:buNone/>
             </a:pPr>
             <a:r>
@@ -12628,7 +12390,7 @@
           </a:bodyPr>
           <a:lstStyle/>
           <a:p>
-            <a:pPr algn="l" indent="0" marL="0">
+            <a:pPr marL="0" indent="0" algn="l">
               <a:buNone/>
             </a:pPr>
             <a:r>
@@ -12696,7 +12458,7 @@
           </a:bodyPr>
           <a:lstStyle/>
           <a:p>
-            <a:pPr algn="ctr" indent="0" marL="0">
+            <a:pPr marL="0" indent="0" algn="ctr">
               <a:buNone/>
             </a:pPr>
             <a:r>
@@ -12764,7 +12526,7 @@
           </a:bodyPr>
           <a:lstStyle/>
           <a:p>
-            <a:pPr algn="l" indent="0" marL="0">
+            <a:pPr marL="0" indent="0" algn="l">
               <a:buNone/>
             </a:pPr>
             <a:r>
@@ -12832,7 +12594,7 @@
           </a:bodyPr>
           <a:lstStyle/>
           <a:p>
-            <a:pPr algn="ctr" indent="0" marL="0">
+            <a:pPr marL="0" indent="0" algn="ctr">
               <a:buNone/>
             </a:pPr>
             <a:r>
@@ -12900,7 +12662,7 @@
           </a:bodyPr>
           <a:lstStyle/>
           <a:p>
-            <a:pPr algn="l" indent="0" marL="0">
+            <a:pPr marL="0" indent="0" algn="l">
               <a:buNone/>
             </a:pPr>
             <a:r>
@@ -12968,7 +12730,7 @@
           </a:bodyPr>
           <a:lstStyle/>
           <a:p>
-            <a:pPr algn="ctr" indent="0" marL="0">
+            <a:pPr marL="0" indent="0" algn="ctr">
               <a:buNone/>
             </a:pPr>
             <a:r>
@@ -13036,7 +12798,7 @@
           </a:bodyPr>
           <a:lstStyle/>
           <a:p>
-            <a:pPr algn="l" indent="0" marL="0">
+            <a:pPr marL="0" indent="0" algn="l">
               <a:buNone/>
             </a:pPr>
             <a:r>
@@ -13104,7 +12866,7 @@
           </a:bodyPr>
           <a:lstStyle/>
           <a:p>
-            <a:pPr algn="ctr" indent="0" marL="0">
+            <a:pPr marL="0" indent="0" algn="ctr">
               <a:buNone/>
             </a:pPr>
             <a:r>
@@ -13172,7 +12934,7 @@
           </a:bodyPr>
           <a:lstStyle/>
           <a:p>
-            <a:pPr algn="l" indent="0" marL="0">
+            <a:pPr marL="0" indent="0" algn="l">
               <a:buNone/>
             </a:pPr>
             <a:r>
@@ -13240,7 +13002,7 @@
           </a:bodyPr>
           <a:lstStyle/>
           <a:p>
-            <a:pPr algn="ctr" indent="0" marL="0">
+            <a:pPr marL="0" indent="0" algn="ctr">
               <a:buNone/>
             </a:pPr>
             <a:r>
@@ -13308,7 +13070,7 @@
           </a:bodyPr>
           <a:lstStyle/>
           <a:p>
-            <a:pPr algn="l" indent="0" marL="0">
+            <a:pPr marL="0" indent="0" algn="l">
               <a:buNone/>
             </a:pPr>
             <a:r>
@@ -13376,7 +13138,7 @@
           </a:bodyPr>
           <a:lstStyle/>
           <a:p>
-            <a:pPr algn="ctr" indent="0" marL="0">
+            <a:pPr marL="0" indent="0" algn="ctr">
               <a:buNone/>
             </a:pPr>
             <a:r>
@@ -13695,4 +13457,299 @@
     </a:ext>
   </a:extLst>
 </a:theme>
+</file>
+
+<file path=ppt/theme/theme2.xml><?xml version="1.0" encoding="utf-8"?>
+<a:theme xmlns:a="http://schemas.openxmlformats.org/drawingml/2006/main" name="Office 테마">
+  <a:themeElements>
+    <a:clrScheme name="Office">
+      <a:dk1>
+        <a:sysClr val="windowText" lastClr="000000"/>
+      </a:dk1>
+      <a:lt1>
+        <a:sysClr val="window" lastClr="FFFFFF"/>
+      </a:lt1>
+      <a:dk2>
+        <a:srgbClr val="44546A"/>
+      </a:dk2>
+      <a:lt2>
+        <a:srgbClr val="E7E6E6"/>
+      </a:lt2>
+      <a:accent1>
+        <a:srgbClr val="4472C4"/>
+      </a:accent1>
+      <a:accent2>
+        <a:srgbClr val="ED7D31"/>
+      </a:accent2>
+      <a:accent3>
+        <a:srgbClr val="A5A5A5"/>
+      </a:accent3>
+      <a:accent4>
+        <a:srgbClr val="FFC000"/>
+      </a:accent4>
+      <a:accent5>
+        <a:srgbClr val="5B9BD5"/>
+      </a:accent5>
+      <a:accent6>
+        <a:srgbClr val="70AD47"/>
+      </a:accent6>
+      <a:hlink>
+        <a:srgbClr val="0563C1"/>
+      </a:hlink>
+      <a:folHlink>
+        <a:srgbClr val="954F72"/>
+      </a:folHlink>
+    </a:clrScheme>
+    <a:fontScheme name="Office">
+      <a:majorFont>
+        <a:latin typeface="맑은 고딕" panose="020F0302020204030204"/>
+        <a:ea typeface=""/>
+        <a:cs typeface=""/>
+        <a:font script="Jpan" typeface="游ゴシック Light"/>
+        <a:font script="Hang" typeface="맑은 고딕"/>
+        <a:font script="Hans" typeface="等线 Light"/>
+        <a:font script="Hant" typeface="新細明體"/>
+        <a:font script="Arab" typeface="Times New Roman"/>
+        <a:font script="Hebr" typeface="Times New Roman"/>
+        <a:font script="Thai" typeface="Angsana New"/>
+        <a:font script="Ethi" typeface="Nyala"/>
+        <a:font script="Beng" typeface="Vrinda"/>
+        <a:font script="Gujr" typeface="Shruti"/>
+        <a:font script="Khmr" typeface="MoolBoran"/>
+        <a:font script="Knda" typeface="Tunga"/>
+        <a:font script="Guru" typeface="Raavi"/>
+        <a:font script="Cans" typeface="Euphemia"/>
+        <a:font script="Cher" typeface="Plantagenet Cherokee"/>
+        <a:font script="Yiii" typeface="Microsoft Yi Baiti"/>
+        <a:font script="Tibt" typeface="Microsoft Himalaya"/>
+        <a:font script="Thaa" typeface="MV Boli"/>
+        <a:font script="Deva" typeface="Mangal"/>
+        <a:font script="Telu" typeface="Gautami"/>
+        <a:font script="Taml" typeface="Latha"/>
+        <a:font script="Syrc" typeface="Estrangelo Edessa"/>
+        <a:font script="Orya" typeface="Kalinga"/>
+        <a:font script="Mlym" typeface="Kartika"/>
+        <a:font script="Laoo" typeface="DokChampa"/>
+        <a:font script="Sinh" typeface="Iskoola Pota"/>
+        <a:font script="Mong" typeface="Mongolian Baiti"/>
+        <a:font script="Viet" typeface="Times New Roman"/>
+        <a:font script="Uigh" typeface="Microsoft Uighur"/>
+        <a:font script="Geor" typeface="Sylfaen"/>
+        <a:font script="Armn" typeface="Arial"/>
+        <a:font script="Bugi" typeface="Leelawadee UI"/>
+        <a:font script="Bopo" typeface="Microsoft JhengHei"/>
+        <a:font script="Java" typeface="Javanese Text"/>
+        <a:font script="Lisu" typeface="Segoe UI"/>
+        <a:font script="Mymr" typeface="Myanmar Text"/>
+        <a:font script="Nkoo" typeface="Ebrima"/>
+        <a:font script="Olck" typeface="Nirmala UI"/>
+        <a:font script="Osma" typeface="Ebrima"/>
+        <a:font script="Phag" typeface="Phagspa"/>
+        <a:font script="Syrn" typeface="Estrangelo Edessa"/>
+        <a:font script="Syrj" typeface="Estrangelo Edessa"/>
+        <a:font script="Syre" typeface="Estrangelo Edessa"/>
+        <a:font script="Sora" typeface="Nirmala UI"/>
+        <a:font script="Tale" typeface="Microsoft Tai Le"/>
+        <a:font script="Talu" typeface="Microsoft New Tai Lue"/>
+        <a:font script="Tfng" typeface="Ebrima"/>
+      </a:majorFont>
+      <a:minorFont>
+        <a:latin typeface="맑은 고딕" panose="020F0502020204030204"/>
+        <a:ea typeface=""/>
+        <a:cs typeface=""/>
+        <a:font script="Jpan" typeface="游ゴシック"/>
+        <a:font script="Hang" typeface="맑은 고딕"/>
+        <a:font script="Hans" typeface="等线"/>
+        <a:font script="Hant" typeface="新細明體"/>
+        <a:font script="Arab" typeface="Arial"/>
+        <a:font script="Hebr" typeface="Arial"/>
+        <a:font script="Thai" typeface="Cordia New"/>
+        <a:font script="Ethi" typeface="Nyala"/>
+        <a:font script="Beng" typeface="Vrinda"/>
+        <a:font script="Gujr" typeface="Shruti"/>
+        <a:font script="Khmr" typeface="DaunPenh"/>
+        <a:font script="Knda" typeface="Tunga"/>
+        <a:font script="Guru" typeface="Raavi"/>
+        <a:font script="Cans" typeface="Euphemia"/>
+        <a:font script="Cher" typeface="Plantagenet Cherokee"/>
+        <a:font script="Yiii" typeface="Microsoft Yi Baiti"/>
+        <a:font script="Tibt" typeface="Microsoft Himalaya"/>
+        <a:font script="Thaa" typeface="MV Boli"/>
+        <a:font script="Deva" typeface="Mangal"/>
+        <a:font script="Telu" typeface="Gautami"/>
+        <a:font script="Taml" typeface="Latha"/>
+        <a:font script="Syrc" typeface="Estrangelo Edessa"/>
+        <a:font script="Orya" typeface="Kalinga"/>
+        <a:font script="Mlym" typeface="Kartika"/>
+        <a:font script="Laoo" typeface="DokChampa"/>
+        <a:font script="Sinh" typeface="Iskoola Pota"/>
+        <a:font script="Mong" typeface="Mongolian Baiti"/>
+        <a:font script="Viet" typeface="Arial"/>
+        <a:font script="Uigh" typeface="Microsoft Uighur"/>
+        <a:font script="Geor" typeface="Sylfaen"/>
+        <a:font script="Armn" typeface="Arial"/>
+        <a:font script="Bugi" typeface="Leelawadee UI"/>
+        <a:font script="Bopo" typeface="Microsoft JhengHei"/>
+        <a:font script="Java" typeface="Javanese Text"/>
+        <a:font script="Lisu" typeface="Segoe UI"/>
+        <a:font script="Mymr" typeface="Myanmar Text"/>
+        <a:font script="Nkoo" typeface="Ebrima"/>
+        <a:font script="Olck" typeface="Nirmala UI"/>
+        <a:font script="Osma" typeface="Ebrima"/>
+        <a:font script="Phag" typeface="Phagspa"/>
+        <a:font script="Syrn" typeface="Estrangelo Edessa"/>
+        <a:font script="Syrj" typeface="Estrangelo Edessa"/>
+        <a:font script="Syre" typeface="Estrangelo Edessa"/>
+        <a:font script="Sora" typeface="Nirmala UI"/>
+        <a:font script="Tale" typeface="Microsoft Tai Le"/>
+        <a:font script="Talu" typeface="Microsoft New Tai Lue"/>
+        <a:font script="Tfng" typeface="Ebrima"/>
+      </a:minorFont>
+    </a:fontScheme>
+    <a:fmtScheme name="Office">
+      <a:fillStyleLst>
+        <a:solidFill>
+          <a:schemeClr val="phClr"/>
+        </a:solidFill>
+        <a:gradFill rotWithShape="1">
+          <a:gsLst>
+            <a:gs pos="0">
+              <a:schemeClr val="phClr">
+                <a:lumMod val="110000"/>
+                <a:satMod val="105000"/>
+                <a:tint val="67000"/>
+              </a:schemeClr>
+            </a:gs>
+            <a:gs pos="50000">
+              <a:schemeClr val="phClr">
+                <a:lumMod val="105000"/>
+                <a:satMod val="103000"/>
+                <a:tint val="73000"/>
+              </a:schemeClr>
+            </a:gs>
+            <a:gs pos="100000">
+              <a:schemeClr val="phClr">
+                <a:lumMod val="105000"/>
+                <a:satMod val="109000"/>
+                <a:tint val="81000"/>
+              </a:schemeClr>
+            </a:gs>
+          </a:gsLst>
+          <a:lin ang="5400000" scaled="0"/>
+        </a:gradFill>
+        <a:gradFill rotWithShape="1">
+          <a:gsLst>
+            <a:gs pos="0">
+              <a:schemeClr val="phClr">
+                <a:satMod val="103000"/>
+                <a:lumMod val="102000"/>
+                <a:tint val="94000"/>
+              </a:schemeClr>
+            </a:gs>
+            <a:gs pos="50000">
+              <a:schemeClr val="phClr">
+                <a:satMod val="110000"/>
+                <a:lumMod val="100000"/>
+                <a:shade val="100000"/>
+              </a:schemeClr>
+            </a:gs>
+            <a:gs pos="100000">
+              <a:schemeClr val="phClr">
+                <a:lumMod val="99000"/>
+                <a:satMod val="120000"/>
+                <a:shade val="78000"/>
+              </a:schemeClr>
+            </a:gs>
+          </a:gsLst>
+          <a:lin ang="5400000" scaled="0"/>
+        </a:gradFill>
+      </a:fillStyleLst>
+      <a:lnStyleLst>
+        <a:ln w="6350" cap="flat" cmpd="sng" algn="ctr">
+          <a:solidFill>
+            <a:schemeClr val="phClr"/>
+          </a:solidFill>
+          <a:prstDash val="solid"/>
+          <a:miter lim="800000"/>
+        </a:ln>
+        <a:ln w="12700" cap="flat" cmpd="sng" algn="ctr">
+          <a:solidFill>
+            <a:schemeClr val="phClr"/>
+          </a:solidFill>
+          <a:prstDash val="solid"/>
+          <a:miter lim="800000"/>
+        </a:ln>
+        <a:ln w="19050" cap="flat" cmpd="sng" algn="ctr">
+          <a:solidFill>
+            <a:schemeClr val="phClr"/>
+          </a:solidFill>
+          <a:prstDash val="solid"/>
+          <a:miter lim="800000"/>
+        </a:ln>
+      </a:lnStyleLst>
+      <a:effectStyleLst>
+        <a:effectStyle>
+          <a:effectLst/>
+        </a:effectStyle>
+        <a:effectStyle>
+          <a:effectLst/>
+        </a:effectStyle>
+        <a:effectStyle>
+          <a:effectLst>
+            <a:outerShdw blurRad="57150" dist="19050" dir="5400000" algn="ctr" rotWithShape="0">
+              <a:srgbClr val="000000">
+                <a:alpha val="63000"/>
+              </a:srgbClr>
+            </a:outerShdw>
+          </a:effectLst>
+        </a:effectStyle>
+      </a:effectStyleLst>
+      <a:bgFillStyleLst>
+        <a:solidFill>
+          <a:schemeClr val="phClr"/>
+        </a:solidFill>
+        <a:solidFill>
+          <a:schemeClr val="phClr">
+            <a:tint val="95000"/>
+            <a:satMod val="170000"/>
+          </a:schemeClr>
+        </a:solidFill>
+        <a:gradFill rotWithShape="1">
+          <a:gsLst>
+            <a:gs pos="0">
+              <a:schemeClr val="phClr">
+                <a:tint val="93000"/>
+                <a:satMod val="150000"/>
+                <a:shade val="98000"/>
+                <a:lumMod val="102000"/>
+              </a:schemeClr>
+            </a:gs>
+            <a:gs pos="50000">
+              <a:schemeClr val="phClr">
+                <a:tint val="98000"/>
+                <a:satMod val="130000"/>
+                <a:shade val="90000"/>
+                <a:lumMod val="103000"/>
+              </a:schemeClr>
+            </a:gs>
+            <a:gs pos="100000">
+              <a:schemeClr val="phClr">
+                <a:shade val="63000"/>
+                <a:satMod val="120000"/>
+              </a:schemeClr>
+            </a:gs>
+          </a:gsLst>
+          <a:lin ang="5400000" scaled="0"/>
+        </a:gradFill>
+      </a:bgFillStyleLst>
+    </a:fmtScheme>
+  </a:themeElements>
+  <a:objectDefaults/>
+  <a:extraClrSchemeLst/>
+  <a:extLst>
+    <a:ext uri="{05A4C25C-085E-4340-85A3-A5531E510DB2}">
+      <thm15:themeFamily xmlns:thm15="http://schemas.microsoft.com/office/thememl/2012/main" name="Office Theme" id="{62F939B6-93AF-4DB8-9C6B-D6C7DFDC589F}" vid="{4A3C46E8-61CC-4603-A589-7422A47A8E4A}"/>
+    </a:ext>
+  </a:extLst>
+</a:theme>
 </file>